--- a/Doc/Academic/Proposal/Slide_Proposal_Defence_finalized.pptx
+++ b/Doc/Academic/Proposal/Slide_Proposal_Defence_finalized.pptx
@@ -9,6 +9,10 @@
     <p:sldId id="257" r:id="rId3"/>
     <p:sldId id="259" r:id="rId4"/>
     <p:sldId id="260" r:id="rId5"/>
+    <p:sldId id="261" r:id="rId6"/>
+    <p:sldId id="262" r:id="rId7"/>
+    <p:sldId id="263" r:id="rId8"/>
+    <p:sldId id="264" r:id="rId9"/>
   </p:sldIdLst>
   <p:sldSz cx="12192000" cy="6858000"/>
   <p:notesSz cx="6858000" cy="9144000"/>
@@ -107,6 +111,11 @@
       </a:defRPr>
     </a:lvl9pPr>
   </p:defaultTextStyle>
+  <p:extLst>
+    <p:ext uri="{EFAFB233-063F-42B5-8137-9DF3F51BA10A}">
+      <p15:sldGuideLst xmlns:p15="http://schemas.microsoft.com/office/powerpoint/2012/main"/>
+    </p:ext>
+  </p:extLst>
 </p:presentation>
 </file>
 
@@ -263,7 +272,7 @@
           <a:p>
             <a:fld id="{D1D1EADE-8E88-4C7C-8AC5-FB148DE4940E}" type="datetime1">
               <a:rPr lang="en-US" smtClean="0"/>
-              <a:t>12/12/2025</a:t>
+              <a:t>12/20/2025</a:t>
             </a:fld>
             <a:endParaRPr lang="en-US"/>
           </a:p>
@@ -463,7 +472,7 @@
           <a:p>
             <a:fld id="{EC3C8B9C-477D-492A-96AD-1FC2CC997A73}" type="datetime1">
               <a:rPr lang="en-US" smtClean="0"/>
-              <a:t>12/12/2025</a:t>
+              <a:t>12/20/2025</a:t>
             </a:fld>
             <a:endParaRPr lang="en-US"/>
           </a:p>
@@ -673,7 +682,7 @@
           <a:p>
             <a:fld id="{42D3AED5-E26D-4E29-B1B3-7847B6779594}" type="datetime1">
               <a:rPr lang="en-US" smtClean="0"/>
-              <a:t>12/12/2025</a:t>
+              <a:t>12/20/2025</a:t>
             </a:fld>
             <a:endParaRPr lang="en-US"/>
           </a:p>
@@ -873,7 +882,7 @@
           <a:p>
             <a:fld id="{157B6794-849E-4626-908B-D15793550EFB}" type="datetime1">
               <a:rPr lang="en-US" smtClean="0"/>
-              <a:t>12/12/2025</a:t>
+              <a:t>12/20/2025</a:t>
             </a:fld>
             <a:endParaRPr lang="en-US"/>
           </a:p>
@@ -1149,7 +1158,7 @@
           <a:p>
             <a:fld id="{63DB64E7-5594-42A3-ADBF-E95A7ACEAD64}" type="datetime1">
               <a:rPr lang="en-US" smtClean="0"/>
-              <a:t>12/12/2025</a:t>
+              <a:t>12/20/2025</a:t>
             </a:fld>
             <a:endParaRPr lang="en-US"/>
           </a:p>
@@ -1422,7 +1431,7 @@
           <a:p>
             <a:fld id="{18462B0B-D248-4FFB-8695-AD7FA4B1284A}" type="datetime1">
               <a:rPr lang="en-US" smtClean="0"/>
-              <a:t>12/12/2025</a:t>
+              <a:t>12/20/2025</a:t>
             </a:fld>
             <a:endParaRPr lang="en-US"/>
           </a:p>
@@ -1845,7 +1854,7 @@
           <a:p>
             <a:fld id="{D0378EFB-9159-4510-B73F-4F0409ADE937}" type="datetime1">
               <a:rPr lang="en-US" smtClean="0"/>
-              <a:t>12/12/2025</a:t>
+              <a:t>12/20/2025</a:t>
             </a:fld>
             <a:endParaRPr lang="en-US"/>
           </a:p>
@@ -1987,7 +1996,7 @@
           <a:p>
             <a:fld id="{89BC9412-2452-4BED-A324-9D8C115361AD}" type="datetime1">
               <a:rPr lang="en-US" smtClean="0"/>
-              <a:t>12/12/2025</a:t>
+              <a:t>12/20/2025</a:t>
             </a:fld>
             <a:endParaRPr lang="en-US"/>
           </a:p>
@@ -2100,7 +2109,7 @@
           <a:p>
             <a:fld id="{F5318F62-D251-40E8-A23C-F4CFE9FEAB41}" type="datetime1">
               <a:rPr lang="en-US" smtClean="0"/>
-              <a:t>12/12/2025</a:t>
+              <a:t>12/20/2025</a:t>
             </a:fld>
             <a:endParaRPr lang="en-US"/>
           </a:p>
@@ -2413,7 +2422,7 @@
           <a:p>
             <a:fld id="{44F76144-149E-4874-93A5-554A0357CF82}" type="datetime1">
               <a:rPr lang="en-US" smtClean="0"/>
-              <a:t>12/12/2025</a:t>
+              <a:t>12/20/2025</a:t>
             </a:fld>
             <a:endParaRPr lang="en-US"/>
           </a:p>
@@ -2706,7 +2715,7 @@
           <a:p>
             <a:fld id="{50BA65D8-0540-4835-AE5C-25D29DBA01BE}" type="datetime1">
               <a:rPr lang="en-US" smtClean="0"/>
-              <a:t>12/12/2025</a:t>
+              <a:t>12/20/2025</a:t>
             </a:fld>
             <a:endParaRPr lang="en-US"/>
           </a:p>
@@ -2948,7 +2957,7 @@
           <a:p>
             <a:fld id="{E31BA835-12AC-4E8F-955A-EA3F4DE2791F}" type="datetime1">
               <a:rPr lang="en-US" smtClean="0"/>
-              <a:t>12/12/2025</a:t>
+              <a:t>12/20/2025</a:t>
             </a:fld>
             <a:endParaRPr lang="en-US"/>
           </a:p>
@@ -3459,7 +3468,7 @@
       </p:grpSpPr>
       <p:cxnSp>
         <p:nvCxnSpPr>
-          <p:cNvPr id="12" name="Straight Connector 11">
+          <p:cNvPr id="52" name="Straight Connector 51">
             <a:extLst>
               <a:ext uri="{FF2B5EF4-FFF2-40B4-BE49-F238E27FC236}">
                 <a16:creationId xmlns:a16="http://schemas.microsoft.com/office/drawing/2014/main" id="{F64F9B95-9045-48D2-B9F3-2927E98F54AA}"/>
@@ -3511,7 +3520,7 @@
       </p:cxnSp>
       <p:cxnSp>
         <p:nvCxnSpPr>
-          <p:cNvPr id="14" name="Straight Connector 13">
+          <p:cNvPr id="53" name="Straight Connector 52">
             <a:extLst>
               <a:ext uri="{FF2B5EF4-FFF2-40B4-BE49-F238E27FC236}">
                 <a16:creationId xmlns:a16="http://schemas.microsoft.com/office/drawing/2014/main" id="{085AA86F-6A4D-4BCB-A045-D992CDC2959B}"/>
@@ -3563,10 +3572,10 @@
       </p:cxnSp>
       <p:sp>
         <p:nvSpPr>
-          <p:cNvPr id="16" name="Rectangle 15">
-            <a:extLst>
-              <a:ext uri="{FF2B5EF4-FFF2-40B4-BE49-F238E27FC236}">
-                <a16:creationId xmlns:a16="http://schemas.microsoft.com/office/drawing/2014/main" id="{8C048611-791A-466A-A5C1-B0415D43DD81}"/>
+          <p:cNvPr id="54" name="Rectangle 53">
+            <a:extLst>
+              <a:ext uri="{FF2B5EF4-FFF2-40B4-BE49-F238E27FC236}">
+                <a16:creationId xmlns:a16="http://schemas.microsoft.com/office/drawing/2014/main" id="{479833C7-FDE4-4657-B0B1-32BE833C2489}"/>
               </a:ext>
               <a:ext uri="{C183D7F6-B498-43B3-948B-1728B52AA6E4}">
                 <adec:decorative xmlns:adec="http://schemas.microsoft.com/office/drawing/2017/decorative" val="1"/>
@@ -3629,7 +3638,7 @@
       </p:sp>
       <p:sp>
         <p:nvSpPr>
-          <p:cNvPr id="18" name="Rectangle 17">
+          <p:cNvPr id="55" name="Rectangle 54">
             <a:extLst>
               <a:ext uri="{FF2B5EF4-FFF2-40B4-BE49-F238E27FC236}">
                 <a16:creationId xmlns:a16="http://schemas.microsoft.com/office/drawing/2014/main" id="{0ABE7C0B-A2D9-4202-A524-532DA2E2D582}"/>
@@ -3695,10 +3704,10 @@
       </p:sp>
       <p:pic>
         <p:nvPicPr>
-          <p:cNvPr id="7" name="Picture 6" descr="A screenshot of a computer&#10;&#10;AI-generated content may be incorrect.">
-            <a:extLst>
-              <a:ext uri="{FF2B5EF4-FFF2-40B4-BE49-F238E27FC236}">
-                <a16:creationId xmlns:a16="http://schemas.microsoft.com/office/drawing/2014/main" id="{0A161947-E7E2-4BB4-DD25-3FC220F1FD10}"/>
+          <p:cNvPr id="10" name="Picture 9" descr="A screenshot of a computer screen">
+            <a:extLst>
+              <a:ext uri="{FF2B5EF4-FFF2-40B4-BE49-F238E27FC236}">
+                <a16:creationId xmlns:a16="http://schemas.microsoft.com/office/drawing/2014/main" id="{1C8D98A0-99AD-FA5E-87B3-3F873AF859FC}"/>
               </a:ext>
             </a:extLst>
           </p:cNvPr>
@@ -3709,139 +3718,21 @@
         </p:nvPicPr>
         <p:blipFill>
           <a:blip r:embed="rId2"/>
-          <a:srcRect r="7110" b="-1"/>
+          <a:srcRect/>
           <a:stretch>
             <a:fillRect/>
           </a:stretch>
         </p:blipFill>
         <p:spPr>
           <a:xfrm>
-            <a:off x="20" y="10"/>
-            <a:ext cx="12191980" cy="6857990"/>
+            <a:off x="-713984" y="-401617"/>
+            <a:ext cx="14208690" cy="7992389"/>
           </a:xfrm>
           <a:prstGeom prst="rect">
             <a:avLst/>
           </a:prstGeom>
         </p:spPr>
       </p:pic>
-      <p:cxnSp>
-        <p:nvCxnSpPr>
-          <p:cNvPr id="20" name="Straight Connector 19">
-            <a:extLst>
-              <a:ext uri="{FF2B5EF4-FFF2-40B4-BE49-F238E27FC236}">
-                <a16:creationId xmlns:a16="http://schemas.microsoft.com/office/drawing/2014/main" id="{DD0E884A-93C9-44E4-842F-5B6C251F8C7A}"/>
-              </a:ext>
-              <a:ext uri="{C183D7F6-B498-43B3-948B-1728B52AA6E4}">
-                <adec:decorative xmlns:adec="http://schemas.microsoft.com/office/drawing/2017/decorative" val="1"/>
-              </a:ext>
-            </a:extLst>
-          </p:cNvPr>
-          <p:cNvCxnSpPr>
-            <a:cxnSpLocks noGrp="1" noRot="1" noChangeAspect="1" noMove="1" noResize="1" noEditPoints="1" noAdjustHandles="1" noChangeArrowheads="1" noChangeShapeType="1"/>
-          </p:cNvCxnSpPr>
-          <p:nvPr>
-            <p:extLst>
-              <p:ext uri="{386F3935-93C4-4BCD-93E2-E3B085C9AB24}">
-                <p16:designElem xmlns:p16="http://schemas.microsoft.com/office/powerpoint/2015/main" val="1"/>
-              </p:ext>
-            </p:extLst>
-          </p:nvPr>
-        </p:nvCxnSpPr>
-        <p:spPr>
-          <a:xfrm>
-            <a:off x="800476" y="723900"/>
-            <a:ext cx="10610474" cy="0"/>
-          </a:xfrm>
-          <a:prstGeom prst="line">
-            <a:avLst/>
-          </a:prstGeom>
-          <a:ln w="44450">
-            <a:solidFill>
-              <a:srgbClr val="FFFFFF"/>
-            </a:solidFill>
-          </a:ln>
-          <a:effectLst>
-            <a:outerShdw blurRad="50800" dist="25400" dir="2700000" sx="99000" sy="99000" algn="tl" rotWithShape="0">
-              <a:prstClr val="black">
-                <a:alpha val="20000"/>
-              </a:prstClr>
-            </a:outerShdw>
-          </a:effectLst>
-        </p:spPr>
-        <p:style>
-          <a:lnRef idx="1">
-            <a:schemeClr val="accent1"/>
-          </a:lnRef>
-          <a:fillRef idx="0">
-            <a:schemeClr val="accent1"/>
-          </a:fillRef>
-          <a:effectRef idx="0">
-            <a:schemeClr val="accent1"/>
-          </a:effectRef>
-          <a:fontRef idx="minor">
-            <a:schemeClr val="tx1"/>
-          </a:fontRef>
-        </p:style>
-      </p:cxnSp>
-      <p:cxnSp>
-        <p:nvCxnSpPr>
-          <p:cNvPr id="22" name="Straight Connector 21">
-            <a:extLst>
-              <a:ext uri="{FF2B5EF4-FFF2-40B4-BE49-F238E27FC236}">
-                <a16:creationId xmlns:a16="http://schemas.microsoft.com/office/drawing/2014/main" id="{D10EB31C-CD53-48C2-A9BE-DFB0681AE311}"/>
-              </a:ext>
-              <a:ext uri="{C183D7F6-B498-43B3-948B-1728B52AA6E4}">
-                <adec:decorative xmlns:adec="http://schemas.microsoft.com/office/drawing/2017/decorative" val="1"/>
-              </a:ext>
-            </a:extLst>
-          </p:cNvPr>
-          <p:cNvCxnSpPr>
-            <a:cxnSpLocks noGrp="1" noRot="1" noChangeAspect="1" noMove="1" noResize="1" noEditPoints="1" noAdjustHandles="1" noChangeArrowheads="1" noChangeShapeType="1"/>
-          </p:cNvCxnSpPr>
-          <p:nvPr>
-            <p:extLst>
-              <p:ext uri="{386F3935-93C4-4BCD-93E2-E3B085C9AB24}">
-                <p16:designElem xmlns:p16="http://schemas.microsoft.com/office/powerpoint/2015/main" val="1"/>
-              </p:ext>
-            </p:extLst>
-          </p:nvPr>
-        </p:nvCxnSpPr>
-        <p:spPr>
-          <a:xfrm>
-            <a:off x="800100" y="6134100"/>
-            <a:ext cx="10591800" cy="0"/>
-          </a:xfrm>
-          <a:prstGeom prst="line">
-            <a:avLst/>
-          </a:prstGeom>
-          <a:ln w="12700">
-            <a:solidFill>
-              <a:srgbClr val="FFFFFF"/>
-            </a:solidFill>
-          </a:ln>
-          <a:effectLst>
-            <a:outerShdw blurRad="50800" dist="25400" dir="2700000" sx="99000" sy="99000" algn="tl" rotWithShape="0">
-              <a:prstClr val="black">
-                <a:alpha val="20000"/>
-              </a:prstClr>
-            </a:outerShdw>
-          </a:effectLst>
-        </p:spPr>
-        <p:style>
-          <a:lnRef idx="1">
-            <a:schemeClr val="accent1"/>
-          </a:lnRef>
-          <a:fillRef idx="0">
-            <a:schemeClr val="accent1"/>
-          </a:fillRef>
-          <a:effectRef idx="0">
-            <a:schemeClr val="accent1"/>
-          </a:effectRef>
-          <a:fontRef idx="minor">
-            <a:schemeClr val="tx1"/>
-          </a:fontRef>
-        </p:style>
-      </p:cxnSp>
     </p:spTree>
     <p:extLst>
       <p:ext uri="{BB962C8B-B14F-4D97-AF65-F5344CB8AC3E}">
@@ -4118,10 +4009,10 @@
       </p:sp>
       <p:pic>
         <p:nvPicPr>
-          <p:cNvPr id="5" name="Picture 4" descr="A screenshot of a computer&#10;&#10;AI-generated content may be incorrect.">
-            <a:extLst>
-              <a:ext uri="{FF2B5EF4-FFF2-40B4-BE49-F238E27FC236}">
-                <a16:creationId xmlns:a16="http://schemas.microsoft.com/office/drawing/2014/main" id="{84E1FA99-A907-7A55-CE98-F80E4A941B4E}"/>
+          <p:cNvPr id="3" name="Picture 2" descr="A screenshot of a computer&#10;&#10;AI-generated content may be incorrect.">
+            <a:extLst>
+              <a:ext uri="{FF2B5EF4-FFF2-40B4-BE49-F238E27FC236}">
+                <a16:creationId xmlns:a16="http://schemas.microsoft.com/office/drawing/2014/main" id="{AE46E02A-55A6-7509-1F29-5BD3F4B094D3}"/>
               </a:ext>
             </a:extLst>
           </p:cNvPr>
@@ -4132,15 +4023,14 @@
         </p:nvPicPr>
         <p:blipFill>
           <a:blip r:embed="rId2"/>
-          <a:srcRect t="3017"/>
           <a:stretch>
             <a:fillRect/>
           </a:stretch>
         </p:blipFill>
         <p:spPr>
           <a:xfrm>
-            <a:off x="20" y="10"/>
-            <a:ext cx="12191979" cy="6857989"/>
+            <a:off x="0" y="1390"/>
+            <a:ext cx="12192000" cy="6855220"/>
           </a:xfrm>
           <a:prstGeom prst="rect">
             <a:avLst/>
@@ -4157,8 +4047,8 @@
   <p:clrMapOvr>
     <a:masterClrMapping/>
   </p:clrMapOvr>
-  <p:transition spd="slow">
-    <p:push dir="u"/>
+  <p:transition spd="med">
+    <p:pull/>
   </p:transition>
 </p:sld>
 </file>
@@ -4432,10 +4322,10 @@
       </p:sp>
       <p:pic>
         <p:nvPicPr>
-          <p:cNvPr id="3" name="Picture 2" descr="A screenshot of a computer">
-            <a:extLst>
-              <a:ext uri="{FF2B5EF4-FFF2-40B4-BE49-F238E27FC236}">
-                <a16:creationId xmlns:a16="http://schemas.microsoft.com/office/drawing/2014/main" id="{106CABF6-8242-4B05-3DED-26FCCE3584DB}"/>
+          <p:cNvPr id="4" name="Picture 3" descr="A screenshot of a computer">
+            <a:extLst>
+              <a:ext uri="{FF2B5EF4-FFF2-40B4-BE49-F238E27FC236}">
+                <a16:creationId xmlns:a16="http://schemas.microsoft.com/office/drawing/2014/main" id="{DBFE0117-1194-9DEA-8233-DE3CBA04711B}"/>
               </a:ext>
             </a:extLst>
           </p:cNvPr>
@@ -4446,15 +4336,14 @@
         </p:nvPicPr>
         <p:blipFill>
           <a:blip r:embed="rId2"/>
-          <a:srcRect t="3017"/>
           <a:stretch>
             <a:fillRect/>
           </a:stretch>
         </p:blipFill>
         <p:spPr>
           <a:xfrm>
-            <a:off x="20" y="10"/>
-            <a:ext cx="12191979" cy="6857989"/>
+            <a:off x="0" y="1390"/>
+            <a:ext cx="12192000" cy="6855220"/>
           </a:xfrm>
           <a:prstGeom prst="rect">
             <a:avLst/>
@@ -4510,7 +4399,7 @@
       </p:grpSpPr>
       <p:cxnSp>
         <p:nvCxnSpPr>
-          <p:cNvPr id="32" name="Straight Connector 31">
+          <p:cNvPr id="43" name="Straight Connector 42">
             <a:extLst>
               <a:ext uri="{FF2B5EF4-FFF2-40B4-BE49-F238E27FC236}">
                 <a16:creationId xmlns:a16="http://schemas.microsoft.com/office/drawing/2014/main" id="{F64F9B95-9045-48D2-B9F3-2927E98F54AA}"/>
@@ -4562,7 +4451,7 @@
       </p:cxnSp>
       <p:cxnSp>
         <p:nvCxnSpPr>
-          <p:cNvPr id="34" name="Straight Connector 33">
+          <p:cNvPr id="45" name="Straight Connector 44">
             <a:extLst>
               <a:ext uri="{FF2B5EF4-FFF2-40B4-BE49-F238E27FC236}">
                 <a16:creationId xmlns:a16="http://schemas.microsoft.com/office/drawing/2014/main" id="{085AA86F-6A4D-4BCB-A045-D992CDC2959B}"/>
@@ -4614,7 +4503,7 @@
       </p:cxnSp>
       <p:sp>
         <p:nvSpPr>
-          <p:cNvPr id="36" name="Rectangle 35">
+          <p:cNvPr id="47" name="Rectangle 46">
             <a:extLst>
               <a:ext uri="{FF2B5EF4-FFF2-40B4-BE49-F238E27FC236}">
                 <a16:creationId xmlns:a16="http://schemas.microsoft.com/office/drawing/2014/main" id="{479833C7-FDE4-4657-B0B1-32BE833C2489}"/>
@@ -4680,7 +4569,7 @@
       </p:sp>
       <p:sp>
         <p:nvSpPr>
-          <p:cNvPr id="38" name="Rectangle 37">
+          <p:cNvPr id="49" name="Rectangle 48">
             <a:extLst>
               <a:ext uri="{FF2B5EF4-FFF2-40B4-BE49-F238E27FC236}">
                 <a16:creationId xmlns:a16="http://schemas.microsoft.com/office/drawing/2014/main" id="{0ABE7C0B-A2D9-4202-A524-532DA2E2D582}"/>
@@ -4746,10 +4635,10 @@
       </p:sp>
       <p:pic>
         <p:nvPicPr>
-          <p:cNvPr id="4" name="Picture 3" descr="A screenshot of a computer&#10;&#10;AI-generated content may be incorrect.">
-            <a:extLst>
-              <a:ext uri="{FF2B5EF4-FFF2-40B4-BE49-F238E27FC236}">
-                <a16:creationId xmlns:a16="http://schemas.microsoft.com/office/drawing/2014/main" id="{F37A4D1A-098B-CF8A-B3DA-6E524880E667}"/>
+          <p:cNvPr id="3" name="Picture 2" descr="A screenshot of a computer&#10;&#10;AI-generated content may be incorrect.">
+            <a:extLst>
+              <a:ext uri="{FF2B5EF4-FFF2-40B4-BE49-F238E27FC236}">
+                <a16:creationId xmlns:a16="http://schemas.microsoft.com/office/drawing/2014/main" id="{9A1040FF-2F32-3557-CDE5-DD39FE643174}"/>
               </a:ext>
             </a:extLst>
           </p:cNvPr>
@@ -4760,7 +4649,7 @@
         </p:nvPicPr>
         <p:blipFill>
           <a:blip r:embed="rId2"/>
-          <a:srcRect b="3434"/>
+          <a:srcRect/>
           <a:stretch>
             <a:fillRect/>
           </a:stretch>
@@ -4788,6 +4677,1420 @@
   <p:transition spd="slow">
     <p:push dir="u"/>
   </p:transition>
+</p:sld>
+</file>
+
+<file path=ppt/slides/slide5.xml><?xml version="1.0" encoding="utf-8"?>
+<p:sld xmlns:a="http://schemas.openxmlformats.org/drawingml/2006/main" xmlns:r="http://schemas.openxmlformats.org/officeDocument/2006/relationships" xmlns:p="http://schemas.openxmlformats.org/presentationml/2006/main">
+  <p:cSld>
+    <p:bg>
+      <p:bgPr>
+        <a:solidFill>
+          <a:schemeClr val="bg1"/>
+        </a:solidFill>
+        <a:effectLst/>
+      </p:bgPr>
+    </p:bg>
+    <p:spTree>
+      <p:nvGrpSpPr>
+        <p:cNvPr id="1" name="">
+          <a:extLst>
+            <a:ext uri="{FF2B5EF4-FFF2-40B4-BE49-F238E27FC236}">
+              <a16:creationId xmlns:a16="http://schemas.microsoft.com/office/drawing/2014/main" id="{BD617095-FE8A-7A87-E8FE-2294CD8CC7F0}"/>
+            </a:ext>
+          </a:extLst>
+        </p:cNvPr>
+        <p:cNvGrpSpPr/>
+        <p:nvPr/>
+      </p:nvGrpSpPr>
+      <p:grpSpPr>
+        <a:xfrm>
+          <a:off x="0" y="0"/>
+          <a:ext cx="0" cy="0"/>
+          <a:chOff x="0" y="0"/>
+          <a:chExt cx="0" cy="0"/>
+        </a:xfrm>
+      </p:grpSpPr>
+      <p:cxnSp>
+        <p:nvCxnSpPr>
+          <p:cNvPr id="43" name="Straight Connector 42">
+            <a:extLst>
+              <a:ext uri="{FF2B5EF4-FFF2-40B4-BE49-F238E27FC236}">
+                <a16:creationId xmlns:a16="http://schemas.microsoft.com/office/drawing/2014/main" id="{ACF96A7A-4DF9-A03F-81DD-4817EDE44AEB}"/>
+              </a:ext>
+              <a:ext uri="{C183D7F6-B498-43B3-948B-1728B52AA6E4}">
+                <adec:decorative xmlns:adec="http://schemas.microsoft.com/office/drawing/2017/decorative" val="1"/>
+              </a:ext>
+            </a:extLst>
+          </p:cNvPr>
+          <p:cNvCxnSpPr>
+            <a:cxnSpLocks noGrp="1" noRot="1" noChangeAspect="1" noMove="1" noResize="1" noEditPoints="1" noAdjustHandles="1" noChangeArrowheads="1" noChangeShapeType="1"/>
+          </p:cNvCxnSpPr>
+          <p:nvPr>
+            <p:extLst>
+              <p:ext uri="{386F3935-93C4-4BCD-93E2-E3B085C9AB24}">
+                <p16:designElem xmlns:p16="http://schemas.microsoft.com/office/powerpoint/2015/main" val="1"/>
+              </p:ext>
+            </p:extLst>
+          </p:nvPr>
+        </p:nvCxnSpPr>
+        <p:spPr>
+          <a:xfrm>
+            <a:off x="800100" y="723900"/>
+            <a:ext cx="10591800" cy="0"/>
+          </a:xfrm>
+          <a:prstGeom prst="line">
+            <a:avLst/>
+          </a:prstGeom>
+          <a:ln w="44450">
+            <a:solidFill>
+              <a:schemeClr val="tx1"/>
+            </a:solidFill>
+          </a:ln>
+        </p:spPr>
+        <p:style>
+          <a:lnRef idx="1">
+            <a:schemeClr val="accent1"/>
+          </a:lnRef>
+          <a:fillRef idx="0">
+            <a:schemeClr val="accent1"/>
+          </a:fillRef>
+          <a:effectRef idx="0">
+            <a:schemeClr val="accent1"/>
+          </a:effectRef>
+          <a:fontRef idx="minor">
+            <a:schemeClr val="tx1"/>
+          </a:fontRef>
+        </p:style>
+      </p:cxnSp>
+      <p:cxnSp>
+        <p:nvCxnSpPr>
+          <p:cNvPr id="45" name="Straight Connector 44">
+            <a:extLst>
+              <a:ext uri="{FF2B5EF4-FFF2-40B4-BE49-F238E27FC236}">
+                <a16:creationId xmlns:a16="http://schemas.microsoft.com/office/drawing/2014/main" id="{3AEEF1E5-0D2A-EE47-4A9B-60FE0DBCD05F}"/>
+              </a:ext>
+              <a:ext uri="{C183D7F6-B498-43B3-948B-1728B52AA6E4}">
+                <adec:decorative xmlns:adec="http://schemas.microsoft.com/office/drawing/2017/decorative" val="1"/>
+              </a:ext>
+            </a:extLst>
+          </p:cNvPr>
+          <p:cNvCxnSpPr>
+            <a:cxnSpLocks noGrp="1" noRot="1" noChangeAspect="1" noMove="1" noResize="1" noEditPoints="1" noAdjustHandles="1" noChangeArrowheads="1" noChangeShapeType="1"/>
+          </p:cNvCxnSpPr>
+          <p:nvPr>
+            <p:extLst>
+              <p:ext uri="{386F3935-93C4-4BCD-93E2-E3B085C9AB24}">
+                <p16:designElem xmlns:p16="http://schemas.microsoft.com/office/powerpoint/2015/main" val="1"/>
+              </p:ext>
+            </p:extLst>
+          </p:nvPr>
+        </p:nvCxnSpPr>
+        <p:spPr>
+          <a:xfrm>
+            <a:off x="800100" y="6142781"/>
+            <a:ext cx="10591800" cy="0"/>
+          </a:xfrm>
+          <a:prstGeom prst="line">
+            <a:avLst/>
+          </a:prstGeom>
+          <a:ln w="12700">
+            <a:solidFill>
+              <a:schemeClr val="tx1"/>
+            </a:solidFill>
+          </a:ln>
+        </p:spPr>
+        <p:style>
+          <a:lnRef idx="1">
+            <a:schemeClr val="accent1"/>
+          </a:lnRef>
+          <a:fillRef idx="0">
+            <a:schemeClr val="accent1"/>
+          </a:fillRef>
+          <a:effectRef idx="0">
+            <a:schemeClr val="accent1"/>
+          </a:effectRef>
+          <a:fontRef idx="minor">
+            <a:schemeClr val="tx1"/>
+          </a:fontRef>
+        </p:style>
+      </p:cxnSp>
+      <p:sp>
+        <p:nvSpPr>
+          <p:cNvPr id="47" name="Rectangle 46">
+            <a:extLst>
+              <a:ext uri="{FF2B5EF4-FFF2-40B4-BE49-F238E27FC236}">
+                <a16:creationId xmlns:a16="http://schemas.microsoft.com/office/drawing/2014/main" id="{37C9848D-C1CF-62FC-884D-18041C1FB63A}"/>
+              </a:ext>
+              <a:ext uri="{C183D7F6-B498-43B3-948B-1728B52AA6E4}">
+                <adec:decorative xmlns:adec="http://schemas.microsoft.com/office/drawing/2017/decorative" val="1"/>
+              </a:ext>
+            </a:extLst>
+          </p:cNvPr>
+          <p:cNvSpPr>
+            <a:spLocks noGrp="1" noRot="1" noChangeAspect="1" noMove="1" noResize="1" noEditPoints="1" noAdjustHandles="1" noChangeArrowheads="1" noChangeShapeType="1" noTextEdit="1"/>
+          </p:cNvSpPr>
+          <p:nvPr>
+            <p:extLst>
+              <p:ext uri="{386F3935-93C4-4BCD-93E2-E3B085C9AB24}">
+                <p16:designElem xmlns:p16="http://schemas.microsoft.com/office/powerpoint/2015/main" val="1"/>
+              </p:ext>
+            </p:extLst>
+          </p:nvPr>
+        </p:nvSpPr>
+        <p:spPr>
+          <a:xfrm>
+            <a:off x="0" y="0"/>
+            <a:ext cx="12192000" cy="6858000"/>
+          </a:xfrm>
+          <a:prstGeom prst="rect">
+            <a:avLst/>
+          </a:prstGeom>
+          <a:solidFill>
+            <a:schemeClr val="bg1"/>
+          </a:solidFill>
+          <a:ln w="12700" cap="flat" cmpd="sng" algn="ctr">
+            <a:noFill/>
+            <a:prstDash val="solid"/>
+            <a:miter lim="800000"/>
+          </a:ln>
+          <a:effectLst/>
+        </p:spPr>
+        <p:style>
+          <a:lnRef idx="2">
+            <a:schemeClr val="accent1">
+              <a:shade val="50000"/>
+            </a:schemeClr>
+          </a:lnRef>
+          <a:fillRef idx="1">
+            <a:schemeClr val="accent1"/>
+          </a:fillRef>
+          <a:effectRef idx="0">
+            <a:schemeClr val="accent1"/>
+          </a:effectRef>
+          <a:fontRef idx="minor">
+            <a:schemeClr val="lt1"/>
+          </a:fontRef>
+        </p:style>
+        <p:txBody>
+          <a:bodyPr rtlCol="0" anchor="ctr"/>
+          <a:lstStyle/>
+          <a:p>
+            <a:pPr algn="ctr"/>
+            <a:endParaRPr lang="en-US"/>
+          </a:p>
+        </p:txBody>
+      </p:sp>
+      <p:sp>
+        <p:nvSpPr>
+          <p:cNvPr id="49" name="Rectangle 48">
+            <a:extLst>
+              <a:ext uri="{FF2B5EF4-FFF2-40B4-BE49-F238E27FC236}">
+                <a16:creationId xmlns:a16="http://schemas.microsoft.com/office/drawing/2014/main" id="{D1BA4DDF-D8EA-F918-400D-96238837F84F}"/>
+              </a:ext>
+              <a:ext uri="{C183D7F6-B498-43B3-948B-1728B52AA6E4}">
+                <adec:decorative xmlns:adec="http://schemas.microsoft.com/office/drawing/2017/decorative" val="1"/>
+              </a:ext>
+            </a:extLst>
+          </p:cNvPr>
+          <p:cNvSpPr>
+            <a:spLocks noGrp="1" noRot="1" noChangeAspect="1" noMove="1" noResize="1" noEditPoints="1" noAdjustHandles="1" noChangeArrowheads="1" noChangeShapeType="1" noTextEdit="1"/>
+          </p:cNvSpPr>
+          <p:nvPr>
+            <p:extLst>
+              <p:ext uri="{386F3935-93C4-4BCD-93E2-E3B085C9AB24}">
+                <p16:designElem xmlns:p16="http://schemas.microsoft.com/office/powerpoint/2015/main" val="1"/>
+              </p:ext>
+            </p:extLst>
+          </p:nvPr>
+        </p:nvSpPr>
+        <p:spPr>
+          <a:xfrm>
+            <a:off x="0" y="0"/>
+            <a:ext cx="12192000" cy="6858000"/>
+          </a:xfrm>
+          <a:prstGeom prst="rect">
+            <a:avLst/>
+          </a:prstGeom>
+          <a:solidFill>
+            <a:schemeClr val="bg1"/>
+          </a:solidFill>
+          <a:ln w="12700" cap="flat" cmpd="sng" algn="ctr">
+            <a:noFill/>
+            <a:prstDash val="solid"/>
+            <a:miter lim="800000"/>
+          </a:ln>
+          <a:effectLst/>
+        </p:spPr>
+        <p:style>
+          <a:lnRef idx="2">
+            <a:schemeClr val="accent1">
+              <a:shade val="50000"/>
+            </a:schemeClr>
+          </a:lnRef>
+          <a:fillRef idx="1">
+            <a:schemeClr val="accent1"/>
+          </a:fillRef>
+          <a:effectRef idx="0">
+            <a:schemeClr val="accent1"/>
+          </a:effectRef>
+          <a:fontRef idx="minor">
+            <a:schemeClr val="lt1"/>
+          </a:fontRef>
+        </p:style>
+        <p:txBody>
+          <a:bodyPr rtlCol="0" anchor="ctr"/>
+          <a:lstStyle/>
+          <a:p>
+            <a:pPr algn="ctr"/>
+            <a:endParaRPr lang="en-US"/>
+          </a:p>
+        </p:txBody>
+      </p:sp>
+      <p:pic>
+        <p:nvPicPr>
+          <p:cNvPr id="6" name="Picture 5" descr="A screenshot of a computer&#10;&#10;AI-generated content may be incorrect.">
+            <a:extLst>
+              <a:ext uri="{FF2B5EF4-FFF2-40B4-BE49-F238E27FC236}">
+                <a16:creationId xmlns:a16="http://schemas.microsoft.com/office/drawing/2014/main" id="{E5ADBD74-4E49-270E-BE6D-F3ACB48958BE}"/>
+              </a:ext>
+            </a:extLst>
+          </p:cNvPr>
+          <p:cNvPicPr>
+            <a:picLocks noChangeAspect="1"/>
+          </p:cNvPicPr>
+          <p:nvPr/>
+        </p:nvPicPr>
+        <p:blipFill>
+          <a:blip r:embed="rId2"/>
+          <a:stretch>
+            <a:fillRect/>
+          </a:stretch>
+        </p:blipFill>
+        <p:spPr>
+          <a:xfrm>
+            <a:off x="0" y="1390"/>
+            <a:ext cx="12192000" cy="6855220"/>
+          </a:xfrm>
+          <a:prstGeom prst="rect">
+            <a:avLst/>
+          </a:prstGeom>
+        </p:spPr>
+      </p:pic>
+      <p:sp>
+        <p:nvSpPr>
+          <p:cNvPr id="7" name="TextBox 6">
+            <a:extLst>
+              <a:ext uri="{FF2B5EF4-FFF2-40B4-BE49-F238E27FC236}">
+                <a16:creationId xmlns:a16="http://schemas.microsoft.com/office/drawing/2014/main" id="{F4B09377-4288-E306-F101-E099259302A0}"/>
+              </a:ext>
+            </a:extLst>
+          </p:cNvPr>
+          <p:cNvSpPr txBox="1"/>
+          <p:nvPr/>
+        </p:nvSpPr>
+        <p:spPr>
+          <a:xfrm>
+            <a:off x="0" y="113122"/>
+            <a:ext cx="4119513" cy="461665"/>
+          </a:xfrm>
+          <a:prstGeom prst="rect">
+            <a:avLst/>
+          </a:prstGeom>
+          <a:noFill/>
+        </p:spPr>
+        <p:txBody>
+          <a:bodyPr wrap="square" rtlCol="0">
+            <a:spAutoFit/>
+          </a:bodyPr>
+          <a:lstStyle/>
+          <a:p>
+            <a:r>
+              <a:rPr lang="en-US" sz="2400" b="1" dirty="0">
+                <a:solidFill>
+                  <a:schemeClr val="bg1"/>
+                </a:solidFill>
+              </a:rPr>
+              <a:t>LITERATURE REVIEW</a:t>
+            </a:r>
+          </a:p>
+        </p:txBody>
+      </p:sp>
+    </p:spTree>
+    <p:extLst>
+      <p:ext uri="{BB962C8B-B14F-4D97-AF65-F5344CB8AC3E}">
+        <p14:creationId xmlns:p14="http://schemas.microsoft.com/office/powerpoint/2010/main" val="4271128602"/>
+      </p:ext>
+    </p:extLst>
+  </p:cSld>
+  <p:clrMapOvr>
+    <a:masterClrMapping/>
+  </p:clrMapOvr>
+  <mc:AlternateContent xmlns:mc="http://schemas.openxmlformats.org/markup-compatibility/2006">
+    <mc:Choice xmlns:p14="http://schemas.microsoft.com/office/powerpoint/2010/main" Requires="p14">
+      <p:transition spd="med" p14:dur="700">
+        <p:fade/>
+      </p:transition>
+    </mc:Choice>
+    <mc:Fallback>
+      <p:transition spd="med">
+        <p:fade/>
+      </p:transition>
+    </mc:Fallback>
+  </mc:AlternateContent>
+</p:sld>
+</file>
+
+<file path=ppt/slides/slide6.xml><?xml version="1.0" encoding="utf-8"?>
+<p:sld xmlns:a="http://schemas.openxmlformats.org/drawingml/2006/main" xmlns:r="http://schemas.openxmlformats.org/officeDocument/2006/relationships" xmlns:p="http://schemas.openxmlformats.org/presentationml/2006/main">
+  <p:cSld>
+    <p:bg>
+      <p:bgPr>
+        <a:solidFill>
+          <a:schemeClr val="bg1"/>
+        </a:solidFill>
+        <a:effectLst/>
+      </p:bgPr>
+    </p:bg>
+    <p:spTree>
+      <p:nvGrpSpPr>
+        <p:cNvPr id="1" name="">
+          <a:extLst>
+            <a:ext uri="{FF2B5EF4-FFF2-40B4-BE49-F238E27FC236}">
+              <a16:creationId xmlns:a16="http://schemas.microsoft.com/office/drawing/2014/main" id="{666AF0C6-21A5-5790-9636-E03B1AB8A5F0}"/>
+            </a:ext>
+          </a:extLst>
+        </p:cNvPr>
+        <p:cNvGrpSpPr/>
+        <p:nvPr/>
+      </p:nvGrpSpPr>
+      <p:grpSpPr>
+        <a:xfrm>
+          <a:off x="0" y="0"/>
+          <a:ext cx="0" cy="0"/>
+          <a:chOff x="0" y="0"/>
+          <a:chExt cx="0" cy="0"/>
+        </a:xfrm>
+      </p:grpSpPr>
+      <p:cxnSp>
+        <p:nvCxnSpPr>
+          <p:cNvPr id="43" name="Straight Connector 42">
+            <a:extLst>
+              <a:ext uri="{FF2B5EF4-FFF2-40B4-BE49-F238E27FC236}">
+                <a16:creationId xmlns:a16="http://schemas.microsoft.com/office/drawing/2014/main" id="{AEFD7F06-48AA-9D55-AC96-96F472FFA819}"/>
+              </a:ext>
+              <a:ext uri="{C183D7F6-B498-43B3-948B-1728B52AA6E4}">
+                <adec:decorative xmlns:adec="http://schemas.microsoft.com/office/drawing/2017/decorative" val="1"/>
+              </a:ext>
+            </a:extLst>
+          </p:cNvPr>
+          <p:cNvCxnSpPr>
+            <a:cxnSpLocks noGrp="1" noRot="1" noChangeAspect="1" noMove="1" noResize="1" noEditPoints="1" noAdjustHandles="1" noChangeArrowheads="1" noChangeShapeType="1"/>
+          </p:cNvCxnSpPr>
+          <p:nvPr>
+            <p:extLst>
+              <p:ext uri="{386F3935-93C4-4BCD-93E2-E3B085C9AB24}">
+                <p16:designElem xmlns:p16="http://schemas.microsoft.com/office/powerpoint/2015/main" val="1"/>
+              </p:ext>
+            </p:extLst>
+          </p:nvPr>
+        </p:nvCxnSpPr>
+        <p:spPr>
+          <a:xfrm>
+            <a:off x="800100" y="723900"/>
+            <a:ext cx="10591800" cy="0"/>
+          </a:xfrm>
+          <a:prstGeom prst="line">
+            <a:avLst/>
+          </a:prstGeom>
+          <a:ln w="44450">
+            <a:solidFill>
+              <a:schemeClr val="tx1"/>
+            </a:solidFill>
+          </a:ln>
+        </p:spPr>
+        <p:style>
+          <a:lnRef idx="1">
+            <a:schemeClr val="accent1"/>
+          </a:lnRef>
+          <a:fillRef idx="0">
+            <a:schemeClr val="accent1"/>
+          </a:fillRef>
+          <a:effectRef idx="0">
+            <a:schemeClr val="accent1"/>
+          </a:effectRef>
+          <a:fontRef idx="minor">
+            <a:schemeClr val="tx1"/>
+          </a:fontRef>
+        </p:style>
+      </p:cxnSp>
+      <p:cxnSp>
+        <p:nvCxnSpPr>
+          <p:cNvPr id="45" name="Straight Connector 44">
+            <a:extLst>
+              <a:ext uri="{FF2B5EF4-FFF2-40B4-BE49-F238E27FC236}">
+                <a16:creationId xmlns:a16="http://schemas.microsoft.com/office/drawing/2014/main" id="{D5005FC7-D6E7-6A24-D7B6-C7E97FD4DB67}"/>
+              </a:ext>
+              <a:ext uri="{C183D7F6-B498-43B3-948B-1728B52AA6E4}">
+                <adec:decorative xmlns:adec="http://schemas.microsoft.com/office/drawing/2017/decorative" val="1"/>
+              </a:ext>
+            </a:extLst>
+          </p:cNvPr>
+          <p:cNvCxnSpPr>
+            <a:cxnSpLocks noGrp="1" noRot="1" noChangeAspect="1" noMove="1" noResize="1" noEditPoints="1" noAdjustHandles="1" noChangeArrowheads="1" noChangeShapeType="1"/>
+          </p:cNvCxnSpPr>
+          <p:nvPr>
+            <p:extLst>
+              <p:ext uri="{386F3935-93C4-4BCD-93E2-E3B085C9AB24}">
+                <p16:designElem xmlns:p16="http://schemas.microsoft.com/office/powerpoint/2015/main" val="1"/>
+              </p:ext>
+            </p:extLst>
+          </p:nvPr>
+        </p:nvCxnSpPr>
+        <p:spPr>
+          <a:xfrm>
+            <a:off x="800100" y="6142781"/>
+            <a:ext cx="10591800" cy="0"/>
+          </a:xfrm>
+          <a:prstGeom prst="line">
+            <a:avLst/>
+          </a:prstGeom>
+          <a:ln w="12700">
+            <a:solidFill>
+              <a:schemeClr val="tx1"/>
+            </a:solidFill>
+          </a:ln>
+        </p:spPr>
+        <p:style>
+          <a:lnRef idx="1">
+            <a:schemeClr val="accent1"/>
+          </a:lnRef>
+          <a:fillRef idx="0">
+            <a:schemeClr val="accent1"/>
+          </a:fillRef>
+          <a:effectRef idx="0">
+            <a:schemeClr val="accent1"/>
+          </a:effectRef>
+          <a:fontRef idx="minor">
+            <a:schemeClr val="tx1"/>
+          </a:fontRef>
+        </p:style>
+      </p:cxnSp>
+      <p:sp>
+        <p:nvSpPr>
+          <p:cNvPr id="47" name="Rectangle 46">
+            <a:extLst>
+              <a:ext uri="{FF2B5EF4-FFF2-40B4-BE49-F238E27FC236}">
+                <a16:creationId xmlns:a16="http://schemas.microsoft.com/office/drawing/2014/main" id="{A1097628-1712-54FE-E3E3-3156E5A465A6}"/>
+              </a:ext>
+              <a:ext uri="{C183D7F6-B498-43B3-948B-1728B52AA6E4}">
+                <adec:decorative xmlns:adec="http://schemas.microsoft.com/office/drawing/2017/decorative" val="1"/>
+              </a:ext>
+            </a:extLst>
+          </p:cNvPr>
+          <p:cNvSpPr>
+            <a:spLocks noGrp="1" noRot="1" noChangeAspect="1" noMove="1" noResize="1" noEditPoints="1" noAdjustHandles="1" noChangeArrowheads="1" noChangeShapeType="1" noTextEdit="1"/>
+          </p:cNvSpPr>
+          <p:nvPr>
+            <p:extLst>
+              <p:ext uri="{386F3935-93C4-4BCD-93E2-E3B085C9AB24}">
+                <p16:designElem xmlns:p16="http://schemas.microsoft.com/office/powerpoint/2015/main" val="1"/>
+              </p:ext>
+            </p:extLst>
+          </p:nvPr>
+        </p:nvSpPr>
+        <p:spPr>
+          <a:xfrm>
+            <a:off x="0" y="0"/>
+            <a:ext cx="12192000" cy="6858000"/>
+          </a:xfrm>
+          <a:prstGeom prst="rect">
+            <a:avLst/>
+          </a:prstGeom>
+          <a:solidFill>
+            <a:schemeClr val="bg1"/>
+          </a:solidFill>
+          <a:ln w="12700" cap="flat" cmpd="sng" algn="ctr">
+            <a:noFill/>
+            <a:prstDash val="solid"/>
+            <a:miter lim="800000"/>
+          </a:ln>
+          <a:effectLst/>
+        </p:spPr>
+        <p:style>
+          <a:lnRef idx="2">
+            <a:schemeClr val="accent1">
+              <a:shade val="50000"/>
+            </a:schemeClr>
+          </a:lnRef>
+          <a:fillRef idx="1">
+            <a:schemeClr val="accent1"/>
+          </a:fillRef>
+          <a:effectRef idx="0">
+            <a:schemeClr val="accent1"/>
+          </a:effectRef>
+          <a:fontRef idx="minor">
+            <a:schemeClr val="lt1"/>
+          </a:fontRef>
+        </p:style>
+        <p:txBody>
+          <a:bodyPr rtlCol="0" anchor="ctr"/>
+          <a:lstStyle/>
+          <a:p>
+            <a:pPr algn="ctr"/>
+            <a:endParaRPr lang="en-US"/>
+          </a:p>
+        </p:txBody>
+      </p:sp>
+      <p:sp>
+        <p:nvSpPr>
+          <p:cNvPr id="49" name="Rectangle 48">
+            <a:extLst>
+              <a:ext uri="{FF2B5EF4-FFF2-40B4-BE49-F238E27FC236}">
+                <a16:creationId xmlns:a16="http://schemas.microsoft.com/office/drawing/2014/main" id="{86DC316E-DC66-E75C-B93C-E3850814FA3B}"/>
+              </a:ext>
+              <a:ext uri="{C183D7F6-B498-43B3-948B-1728B52AA6E4}">
+                <adec:decorative xmlns:adec="http://schemas.microsoft.com/office/drawing/2017/decorative" val="1"/>
+              </a:ext>
+            </a:extLst>
+          </p:cNvPr>
+          <p:cNvSpPr>
+            <a:spLocks noGrp="1" noRot="1" noChangeAspect="1" noMove="1" noResize="1" noEditPoints="1" noAdjustHandles="1" noChangeArrowheads="1" noChangeShapeType="1" noTextEdit="1"/>
+          </p:cNvSpPr>
+          <p:nvPr>
+            <p:extLst>
+              <p:ext uri="{386F3935-93C4-4BCD-93E2-E3B085C9AB24}">
+                <p16:designElem xmlns:p16="http://schemas.microsoft.com/office/powerpoint/2015/main" val="1"/>
+              </p:ext>
+            </p:extLst>
+          </p:nvPr>
+        </p:nvSpPr>
+        <p:spPr>
+          <a:xfrm>
+            <a:off x="0" y="0"/>
+            <a:ext cx="12192000" cy="6858000"/>
+          </a:xfrm>
+          <a:prstGeom prst="rect">
+            <a:avLst/>
+          </a:prstGeom>
+          <a:solidFill>
+            <a:schemeClr val="bg1"/>
+          </a:solidFill>
+          <a:ln w="12700" cap="flat" cmpd="sng" algn="ctr">
+            <a:noFill/>
+            <a:prstDash val="solid"/>
+            <a:miter lim="800000"/>
+          </a:ln>
+          <a:effectLst/>
+        </p:spPr>
+        <p:style>
+          <a:lnRef idx="2">
+            <a:schemeClr val="accent1">
+              <a:shade val="50000"/>
+            </a:schemeClr>
+          </a:lnRef>
+          <a:fillRef idx="1">
+            <a:schemeClr val="accent1"/>
+          </a:fillRef>
+          <a:effectRef idx="0">
+            <a:schemeClr val="accent1"/>
+          </a:effectRef>
+          <a:fontRef idx="minor">
+            <a:schemeClr val="lt1"/>
+          </a:fontRef>
+        </p:style>
+        <p:txBody>
+          <a:bodyPr rtlCol="0" anchor="ctr"/>
+          <a:lstStyle/>
+          <a:p>
+            <a:pPr algn="ctr"/>
+            <a:endParaRPr lang="en-US"/>
+          </a:p>
+        </p:txBody>
+      </p:sp>
+      <p:pic>
+        <p:nvPicPr>
+          <p:cNvPr id="3" name="Picture 2" descr="A screenshot of a computer">
+            <a:extLst>
+              <a:ext uri="{FF2B5EF4-FFF2-40B4-BE49-F238E27FC236}">
+                <a16:creationId xmlns:a16="http://schemas.microsoft.com/office/drawing/2014/main" id="{7ABF2BF9-F4C6-A58E-0AE0-8B26D254D601}"/>
+              </a:ext>
+            </a:extLst>
+          </p:cNvPr>
+          <p:cNvPicPr>
+            <a:picLocks noChangeAspect="1"/>
+          </p:cNvPicPr>
+          <p:nvPr/>
+        </p:nvPicPr>
+        <p:blipFill>
+          <a:blip r:embed="rId2"/>
+          <a:stretch>
+            <a:fillRect/>
+          </a:stretch>
+        </p:blipFill>
+        <p:spPr>
+          <a:xfrm>
+            <a:off x="0" y="1390"/>
+            <a:ext cx="12192000" cy="6855220"/>
+          </a:xfrm>
+          <a:prstGeom prst="rect">
+            <a:avLst/>
+          </a:prstGeom>
+        </p:spPr>
+      </p:pic>
+      <p:sp>
+        <p:nvSpPr>
+          <p:cNvPr id="4" name="TextBox 3">
+            <a:extLst>
+              <a:ext uri="{FF2B5EF4-FFF2-40B4-BE49-F238E27FC236}">
+                <a16:creationId xmlns:a16="http://schemas.microsoft.com/office/drawing/2014/main" id="{A36CBDBD-4399-DA04-8A94-5CE19502AF6E}"/>
+              </a:ext>
+            </a:extLst>
+          </p:cNvPr>
+          <p:cNvSpPr txBox="1"/>
+          <p:nvPr/>
+        </p:nvSpPr>
+        <p:spPr>
+          <a:xfrm>
+            <a:off x="0" y="113122"/>
+            <a:ext cx="4119513" cy="461665"/>
+          </a:xfrm>
+          <a:prstGeom prst="rect">
+            <a:avLst/>
+          </a:prstGeom>
+          <a:noFill/>
+        </p:spPr>
+        <p:txBody>
+          <a:bodyPr wrap="square" rtlCol="0">
+            <a:spAutoFit/>
+          </a:bodyPr>
+          <a:lstStyle/>
+          <a:p>
+            <a:r>
+              <a:rPr lang="en-US" sz="2400" b="1" dirty="0">
+                <a:solidFill>
+                  <a:schemeClr val="bg1"/>
+                </a:solidFill>
+              </a:rPr>
+              <a:t>LITERATURE REVIEW</a:t>
+            </a:r>
+          </a:p>
+        </p:txBody>
+      </p:sp>
+    </p:spTree>
+    <p:extLst>
+      <p:ext uri="{BB962C8B-B14F-4D97-AF65-F5344CB8AC3E}">
+        <p14:creationId xmlns:p14="http://schemas.microsoft.com/office/powerpoint/2010/main" val="2246093270"/>
+      </p:ext>
+    </p:extLst>
+  </p:cSld>
+  <p:clrMapOvr>
+    <a:masterClrMapping/>
+  </p:clrMapOvr>
+  <mc:AlternateContent xmlns:mc="http://schemas.openxmlformats.org/markup-compatibility/2006">
+    <mc:Choice xmlns:p159="http://schemas.microsoft.com/office/powerpoint/2015/09/main" Requires="p159">
+      <p:transition xmlns:p14="http://schemas.microsoft.com/office/powerpoint/2010/main" spd="slow" p14:dur="2000">
+        <p159:morph option="byObject"/>
+      </p:transition>
+    </mc:Choice>
+    <mc:Fallback>
+      <p:transition spd="slow">
+        <p:fade/>
+      </p:transition>
+    </mc:Fallback>
+  </mc:AlternateContent>
+</p:sld>
+</file>
+
+<file path=ppt/slides/slide7.xml><?xml version="1.0" encoding="utf-8"?>
+<p:sld xmlns:a="http://schemas.openxmlformats.org/drawingml/2006/main" xmlns:r="http://schemas.openxmlformats.org/officeDocument/2006/relationships" xmlns:p="http://schemas.openxmlformats.org/presentationml/2006/main">
+  <p:cSld>
+    <p:bg>
+      <p:bgPr>
+        <a:solidFill>
+          <a:schemeClr val="bg1"/>
+        </a:solidFill>
+        <a:effectLst/>
+      </p:bgPr>
+    </p:bg>
+    <p:spTree>
+      <p:nvGrpSpPr>
+        <p:cNvPr id="1" name="">
+          <a:extLst>
+            <a:ext uri="{FF2B5EF4-FFF2-40B4-BE49-F238E27FC236}">
+              <a16:creationId xmlns:a16="http://schemas.microsoft.com/office/drawing/2014/main" id="{65A20B1B-6673-492D-31EB-97416EF053C6}"/>
+            </a:ext>
+          </a:extLst>
+        </p:cNvPr>
+        <p:cNvGrpSpPr/>
+        <p:nvPr/>
+      </p:nvGrpSpPr>
+      <p:grpSpPr>
+        <a:xfrm>
+          <a:off x="0" y="0"/>
+          <a:ext cx="0" cy="0"/>
+          <a:chOff x="0" y="0"/>
+          <a:chExt cx="0" cy="0"/>
+        </a:xfrm>
+      </p:grpSpPr>
+      <p:cxnSp>
+        <p:nvCxnSpPr>
+          <p:cNvPr id="43" name="Straight Connector 42">
+            <a:extLst>
+              <a:ext uri="{FF2B5EF4-FFF2-40B4-BE49-F238E27FC236}">
+                <a16:creationId xmlns:a16="http://schemas.microsoft.com/office/drawing/2014/main" id="{4863342C-9662-C014-662E-72DF77113670}"/>
+              </a:ext>
+              <a:ext uri="{C183D7F6-B498-43B3-948B-1728B52AA6E4}">
+                <adec:decorative xmlns:adec="http://schemas.microsoft.com/office/drawing/2017/decorative" val="1"/>
+              </a:ext>
+            </a:extLst>
+          </p:cNvPr>
+          <p:cNvCxnSpPr>
+            <a:cxnSpLocks noGrp="1" noRot="1" noChangeAspect="1" noMove="1" noResize="1" noEditPoints="1" noAdjustHandles="1" noChangeArrowheads="1" noChangeShapeType="1"/>
+          </p:cNvCxnSpPr>
+          <p:nvPr>
+            <p:extLst>
+              <p:ext uri="{386F3935-93C4-4BCD-93E2-E3B085C9AB24}">
+                <p16:designElem xmlns:p16="http://schemas.microsoft.com/office/powerpoint/2015/main" val="1"/>
+              </p:ext>
+            </p:extLst>
+          </p:nvPr>
+        </p:nvCxnSpPr>
+        <p:spPr>
+          <a:xfrm>
+            <a:off x="800100" y="723900"/>
+            <a:ext cx="10591800" cy="0"/>
+          </a:xfrm>
+          <a:prstGeom prst="line">
+            <a:avLst/>
+          </a:prstGeom>
+          <a:ln w="44450">
+            <a:solidFill>
+              <a:schemeClr val="tx1"/>
+            </a:solidFill>
+          </a:ln>
+        </p:spPr>
+        <p:style>
+          <a:lnRef idx="1">
+            <a:schemeClr val="accent1"/>
+          </a:lnRef>
+          <a:fillRef idx="0">
+            <a:schemeClr val="accent1"/>
+          </a:fillRef>
+          <a:effectRef idx="0">
+            <a:schemeClr val="accent1"/>
+          </a:effectRef>
+          <a:fontRef idx="minor">
+            <a:schemeClr val="tx1"/>
+          </a:fontRef>
+        </p:style>
+      </p:cxnSp>
+      <p:cxnSp>
+        <p:nvCxnSpPr>
+          <p:cNvPr id="45" name="Straight Connector 44">
+            <a:extLst>
+              <a:ext uri="{FF2B5EF4-FFF2-40B4-BE49-F238E27FC236}">
+                <a16:creationId xmlns:a16="http://schemas.microsoft.com/office/drawing/2014/main" id="{A377B408-D675-8F40-9A13-7D99C0FD17B9}"/>
+              </a:ext>
+              <a:ext uri="{C183D7F6-B498-43B3-948B-1728B52AA6E4}">
+                <adec:decorative xmlns:adec="http://schemas.microsoft.com/office/drawing/2017/decorative" val="1"/>
+              </a:ext>
+            </a:extLst>
+          </p:cNvPr>
+          <p:cNvCxnSpPr>
+            <a:cxnSpLocks noGrp="1" noRot="1" noChangeAspect="1" noMove="1" noResize="1" noEditPoints="1" noAdjustHandles="1" noChangeArrowheads="1" noChangeShapeType="1"/>
+          </p:cNvCxnSpPr>
+          <p:nvPr>
+            <p:extLst>
+              <p:ext uri="{386F3935-93C4-4BCD-93E2-E3B085C9AB24}">
+                <p16:designElem xmlns:p16="http://schemas.microsoft.com/office/powerpoint/2015/main" val="1"/>
+              </p:ext>
+            </p:extLst>
+          </p:nvPr>
+        </p:nvCxnSpPr>
+        <p:spPr>
+          <a:xfrm>
+            <a:off x="800100" y="6142781"/>
+            <a:ext cx="10591800" cy="0"/>
+          </a:xfrm>
+          <a:prstGeom prst="line">
+            <a:avLst/>
+          </a:prstGeom>
+          <a:ln w="12700">
+            <a:solidFill>
+              <a:schemeClr val="tx1"/>
+            </a:solidFill>
+          </a:ln>
+        </p:spPr>
+        <p:style>
+          <a:lnRef idx="1">
+            <a:schemeClr val="accent1"/>
+          </a:lnRef>
+          <a:fillRef idx="0">
+            <a:schemeClr val="accent1"/>
+          </a:fillRef>
+          <a:effectRef idx="0">
+            <a:schemeClr val="accent1"/>
+          </a:effectRef>
+          <a:fontRef idx="minor">
+            <a:schemeClr val="tx1"/>
+          </a:fontRef>
+        </p:style>
+      </p:cxnSp>
+      <p:sp>
+        <p:nvSpPr>
+          <p:cNvPr id="47" name="Rectangle 46">
+            <a:extLst>
+              <a:ext uri="{FF2B5EF4-FFF2-40B4-BE49-F238E27FC236}">
+                <a16:creationId xmlns:a16="http://schemas.microsoft.com/office/drawing/2014/main" id="{AC81ECD2-F931-D6DE-B72B-487A3A655B8E}"/>
+              </a:ext>
+              <a:ext uri="{C183D7F6-B498-43B3-948B-1728B52AA6E4}">
+                <adec:decorative xmlns:adec="http://schemas.microsoft.com/office/drawing/2017/decorative" val="1"/>
+              </a:ext>
+            </a:extLst>
+          </p:cNvPr>
+          <p:cNvSpPr>
+            <a:spLocks noGrp="1" noRot="1" noChangeAspect="1" noMove="1" noResize="1" noEditPoints="1" noAdjustHandles="1" noChangeArrowheads="1" noChangeShapeType="1" noTextEdit="1"/>
+          </p:cNvSpPr>
+          <p:nvPr>
+            <p:extLst>
+              <p:ext uri="{386F3935-93C4-4BCD-93E2-E3B085C9AB24}">
+                <p16:designElem xmlns:p16="http://schemas.microsoft.com/office/powerpoint/2015/main" val="1"/>
+              </p:ext>
+            </p:extLst>
+          </p:nvPr>
+        </p:nvSpPr>
+        <p:spPr>
+          <a:xfrm>
+            <a:off x="0" y="0"/>
+            <a:ext cx="12192000" cy="6858000"/>
+          </a:xfrm>
+          <a:prstGeom prst="rect">
+            <a:avLst/>
+          </a:prstGeom>
+          <a:solidFill>
+            <a:schemeClr val="bg1"/>
+          </a:solidFill>
+          <a:ln w="12700" cap="flat" cmpd="sng" algn="ctr">
+            <a:noFill/>
+            <a:prstDash val="solid"/>
+            <a:miter lim="800000"/>
+          </a:ln>
+          <a:effectLst/>
+        </p:spPr>
+        <p:style>
+          <a:lnRef idx="2">
+            <a:schemeClr val="accent1">
+              <a:shade val="50000"/>
+            </a:schemeClr>
+          </a:lnRef>
+          <a:fillRef idx="1">
+            <a:schemeClr val="accent1"/>
+          </a:fillRef>
+          <a:effectRef idx="0">
+            <a:schemeClr val="accent1"/>
+          </a:effectRef>
+          <a:fontRef idx="minor">
+            <a:schemeClr val="lt1"/>
+          </a:fontRef>
+        </p:style>
+        <p:txBody>
+          <a:bodyPr rtlCol="0" anchor="ctr"/>
+          <a:lstStyle/>
+          <a:p>
+            <a:pPr algn="ctr"/>
+            <a:endParaRPr lang="en-US"/>
+          </a:p>
+        </p:txBody>
+      </p:sp>
+      <p:sp>
+        <p:nvSpPr>
+          <p:cNvPr id="49" name="Rectangle 48">
+            <a:extLst>
+              <a:ext uri="{FF2B5EF4-FFF2-40B4-BE49-F238E27FC236}">
+                <a16:creationId xmlns:a16="http://schemas.microsoft.com/office/drawing/2014/main" id="{8E2AE4A3-1FA8-FEE3-9B48-06511CF4B864}"/>
+              </a:ext>
+              <a:ext uri="{C183D7F6-B498-43B3-948B-1728B52AA6E4}">
+                <adec:decorative xmlns:adec="http://schemas.microsoft.com/office/drawing/2017/decorative" val="1"/>
+              </a:ext>
+            </a:extLst>
+          </p:cNvPr>
+          <p:cNvSpPr>
+            <a:spLocks noGrp="1" noRot="1" noChangeAspect="1" noMove="1" noResize="1" noEditPoints="1" noAdjustHandles="1" noChangeArrowheads="1" noChangeShapeType="1" noTextEdit="1"/>
+          </p:cNvSpPr>
+          <p:nvPr>
+            <p:extLst>
+              <p:ext uri="{386F3935-93C4-4BCD-93E2-E3B085C9AB24}">
+                <p16:designElem xmlns:p16="http://schemas.microsoft.com/office/powerpoint/2015/main" val="1"/>
+              </p:ext>
+            </p:extLst>
+          </p:nvPr>
+        </p:nvSpPr>
+        <p:spPr>
+          <a:xfrm>
+            <a:off x="0" y="0"/>
+            <a:ext cx="12192000" cy="6858000"/>
+          </a:xfrm>
+          <a:prstGeom prst="rect">
+            <a:avLst/>
+          </a:prstGeom>
+          <a:solidFill>
+            <a:schemeClr val="bg1"/>
+          </a:solidFill>
+          <a:ln w="12700" cap="flat" cmpd="sng" algn="ctr">
+            <a:noFill/>
+            <a:prstDash val="solid"/>
+            <a:miter lim="800000"/>
+          </a:ln>
+          <a:effectLst/>
+        </p:spPr>
+        <p:style>
+          <a:lnRef idx="2">
+            <a:schemeClr val="accent1">
+              <a:shade val="50000"/>
+            </a:schemeClr>
+          </a:lnRef>
+          <a:fillRef idx="1">
+            <a:schemeClr val="accent1"/>
+          </a:fillRef>
+          <a:effectRef idx="0">
+            <a:schemeClr val="accent1"/>
+          </a:effectRef>
+          <a:fontRef idx="minor">
+            <a:schemeClr val="lt1"/>
+          </a:fontRef>
+        </p:style>
+        <p:txBody>
+          <a:bodyPr rtlCol="0" anchor="ctr"/>
+          <a:lstStyle/>
+          <a:p>
+            <a:pPr algn="ctr"/>
+            <a:endParaRPr lang="en-US"/>
+          </a:p>
+        </p:txBody>
+      </p:sp>
+      <p:pic>
+        <p:nvPicPr>
+          <p:cNvPr id="6" name="Picture 5" descr="A screenshot of a computer">
+            <a:extLst>
+              <a:ext uri="{FF2B5EF4-FFF2-40B4-BE49-F238E27FC236}">
+                <a16:creationId xmlns:a16="http://schemas.microsoft.com/office/drawing/2014/main" id="{9A6093B0-44BE-421C-2282-9CA3ACDFE5B5}"/>
+              </a:ext>
+            </a:extLst>
+          </p:cNvPr>
+          <p:cNvPicPr>
+            <a:picLocks noChangeAspect="1"/>
+          </p:cNvPicPr>
+          <p:nvPr/>
+        </p:nvPicPr>
+        <p:blipFill>
+          <a:blip r:embed="rId2"/>
+          <a:stretch>
+            <a:fillRect/>
+          </a:stretch>
+        </p:blipFill>
+        <p:spPr>
+          <a:xfrm>
+            <a:off x="0" y="1390"/>
+            <a:ext cx="12192000" cy="6855220"/>
+          </a:xfrm>
+          <a:prstGeom prst="rect">
+            <a:avLst/>
+          </a:prstGeom>
+        </p:spPr>
+      </p:pic>
+      <p:sp>
+        <p:nvSpPr>
+          <p:cNvPr id="7" name="TextBox 6">
+            <a:extLst>
+              <a:ext uri="{FF2B5EF4-FFF2-40B4-BE49-F238E27FC236}">
+                <a16:creationId xmlns:a16="http://schemas.microsoft.com/office/drawing/2014/main" id="{39A47C48-498F-3F59-E6C2-C0D703426C71}"/>
+              </a:ext>
+            </a:extLst>
+          </p:cNvPr>
+          <p:cNvSpPr txBox="1"/>
+          <p:nvPr/>
+        </p:nvSpPr>
+        <p:spPr>
+          <a:xfrm>
+            <a:off x="0" y="113122"/>
+            <a:ext cx="4119513" cy="461665"/>
+          </a:xfrm>
+          <a:prstGeom prst="rect">
+            <a:avLst/>
+          </a:prstGeom>
+          <a:noFill/>
+        </p:spPr>
+        <p:txBody>
+          <a:bodyPr wrap="square" rtlCol="0">
+            <a:spAutoFit/>
+          </a:bodyPr>
+          <a:lstStyle/>
+          <a:p>
+            <a:r>
+              <a:rPr lang="en-US" sz="2400" b="1" dirty="0">
+                <a:solidFill>
+                  <a:schemeClr val="bg1"/>
+                </a:solidFill>
+              </a:rPr>
+              <a:t>LITERATURE REVIEW</a:t>
+            </a:r>
+          </a:p>
+        </p:txBody>
+      </p:sp>
+    </p:spTree>
+    <p:extLst>
+      <p:ext uri="{BB962C8B-B14F-4D97-AF65-F5344CB8AC3E}">
+        <p14:creationId xmlns:p14="http://schemas.microsoft.com/office/powerpoint/2010/main" val="3708337618"/>
+      </p:ext>
+    </p:extLst>
+  </p:cSld>
+  <p:clrMapOvr>
+    <a:masterClrMapping/>
+  </p:clrMapOvr>
+  <mc:AlternateContent xmlns:mc="http://schemas.openxmlformats.org/markup-compatibility/2006">
+    <mc:Choice xmlns:p14="http://schemas.microsoft.com/office/powerpoint/2010/main" Requires="p14">
+      <p:transition spd="slow" p14:dur="1500">
+        <p:split orient="vert"/>
+      </p:transition>
+    </mc:Choice>
+    <mc:Fallback>
+      <p:transition spd="slow">
+        <p:split orient="vert"/>
+      </p:transition>
+    </mc:Fallback>
+  </mc:AlternateContent>
+</p:sld>
+</file>
+
+<file path=ppt/slides/slide8.xml><?xml version="1.0" encoding="utf-8"?>
+<p:sld xmlns:a="http://schemas.openxmlformats.org/drawingml/2006/main" xmlns:r="http://schemas.openxmlformats.org/officeDocument/2006/relationships" xmlns:p="http://schemas.openxmlformats.org/presentationml/2006/main">
+  <p:cSld>
+    <p:bg>
+      <p:bgPr>
+        <a:solidFill>
+          <a:schemeClr val="bg1"/>
+        </a:solidFill>
+        <a:effectLst/>
+      </p:bgPr>
+    </p:bg>
+    <p:spTree>
+      <p:nvGrpSpPr>
+        <p:cNvPr id="1" name="">
+          <a:extLst>
+            <a:ext uri="{FF2B5EF4-FFF2-40B4-BE49-F238E27FC236}">
+              <a16:creationId xmlns:a16="http://schemas.microsoft.com/office/drawing/2014/main" id="{432B7E09-DD12-3FAB-68B7-F35F90295ACC}"/>
+            </a:ext>
+          </a:extLst>
+        </p:cNvPr>
+        <p:cNvGrpSpPr/>
+        <p:nvPr/>
+      </p:nvGrpSpPr>
+      <p:grpSpPr>
+        <a:xfrm>
+          <a:off x="0" y="0"/>
+          <a:ext cx="0" cy="0"/>
+          <a:chOff x="0" y="0"/>
+          <a:chExt cx="0" cy="0"/>
+        </a:xfrm>
+      </p:grpSpPr>
+      <p:cxnSp>
+        <p:nvCxnSpPr>
+          <p:cNvPr id="43" name="Straight Connector 42">
+            <a:extLst>
+              <a:ext uri="{FF2B5EF4-FFF2-40B4-BE49-F238E27FC236}">
+                <a16:creationId xmlns:a16="http://schemas.microsoft.com/office/drawing/2014/main" id="{952DA659-04E6-19F5-45EF-B3AF560DB527}"/>
+              </a:ext>
+              <a:ext uri="{C183D7F6-B498-43B3-948B-1728B52AA6E4}">
+                <adec:decorative xmlns:adec="http://schemas.microsoft.com/office/drawing/2017/decorative" val="1"/>
+              </a:ext>
+            </a:extLst>
+          </p:cNvPr>
+          <p:cNvCxnSpPr>
+            <a:cxnSpLocks noGrp="1" noRot="1" noChangeAspect="1" noMove="1" noResize="1" noEditPoints="1" noAdjustHandles="1" noChangeArrowheads="1" noChangeShapeType="1"/>
+          </p:cNvCxnSpPr>
+          <p:nvPr>
+            <p:extLst>
+              <p:ext uri="{386F3935-93C4-4BCD-93E2-E3B085C9AB24}">
+                <p16:designElem xmlns:p16="http://schemas.microsoft.com/office/powerpoint/2015/main" val="1"/>
+              </p:ext>
+            </p:extLst>
+          </p:nvPr>
+        </p:nvCxnSpPr>
+        <p:spPr>
+          <a:xfrm>
+            <a:off x="800100" y="723900"/>
+            <a:ext cx="10591800" cy="0"/>
+          </a:xfrm>
+          <a:prstGeom prst="line">
+            <a:avLst/>
+          </a:prstGeom>
+          <a:ln w="44450">
+            <a:solidFill>
+              <a:schemeClr val="tx1"/>
+            </a:solidFill>
+          </a:ln>
+        </p:spPr>
+        <p:style>
+          <a:lnRef idx="1">
+            <a:schemeClr val="accent1"/>
+          </a:lnRef>
+          <a:fillRef idx="0">
+            <a:schemeClr val="accent1"/>
+          </a:fillRef>
+          <a:effectRef idx="0">
+            <a:schemeClr val="accent1"/>
+          </a:effectRef>
+          <a:fontRef idx="minor">
+            <a:schemeClr val="tx1"/>
+          </a:fontRef>
+        </p:style>
+      </p:cxnSp>
+      <p:cxnSp>
+        <p:nvCxnSpPr>
+          <p:cNvPr id="45" name="Straight Connector 44">
+            <a:extLst>
+              <a:ext uri="{FF2B5EF4-FFF2-40B4-BE49-F238E27FC236}">
+                <a16:creationId xmlns:a16="http://schemas.microsoft.com/office/drawing/2014/main" id="{7CFFB481-A244-6FE0-A26D-134D96FF4DEB}"/>
+              </a:ext>
+              <a:ext uri="{C183D7F6-B498-43B3-948B-1728B52AA6E4}">
+                <adec:decorative xmlns:adec="http://schemas.microsoft.com/office/drawing/2017/decorative" val="1"/>
+              </a:ext>
+            </a:extLst>
+          </p:cNvPr>
+          <p:cNvCxnSpPr>
+            <a:cxnSpLocks noGrp="1" noRot="1" noChangeAspect="1" noMove="1" noResize="1" noEditPoints="1" noAdjustHandles="1" noChangeArrowheads="1" noChangeShapeType="1"/>
+          </p:cNvCxnSpPr>
+          <p:nvPr>
+            <p:extLst>
+              <p:ext uri="{386F3935-93C4-4BCD-93E2-E3B085C9AB24}">
+                <p16:designElem xmlns:p16="http://schemas.microsoft.com/office/powerpoint/2015/main" val="1"/>
+              </p:ext>
+            </p:extLst>
+          </p:nvPr>
+        </p:nvCxnSpPr>
+        <p:spPr>
+          <a:xfrm>
+            <a:off x="800100" y="6142781"/>
+            <a:ext cx="10591800" cy="0"/>
+          </a:xfrm>
+          <a:prstGeom prst="line">
+            <a:avLst/>
+          </a:prstGeom>
+          <a:ln w="12700">
+            <a:solidFill>
+              <a:schemeClr val="tx1"/>
+            </a:solidFill>
+          </a:ln>
+        </p:spPr>
+        <p:style>
+          <a:lnRef idx="1">
+            <a:schemeClr val="accent1"/>
+          </a:lnRef>
+          <a:fillRef idx="0">
+            <a:schemeClr val="accent1"/>
+          </a:fillRef>
+          <a:effectRef idx="0">
+            <a:schemeClr val="accent1"/>
+          </a:effectRef>
+          <a:fontRef idx="minor">
+            <a:schemeClr val="tx1"/>
+          </a:fontRef>
+        </p:style>
+      </p:cxnSp>
+      <p:sp>
+        <p:nvSpPr>
+          <p:cNvPr id="47" name="Rectangle 46">
+            <a:extLst>
+              <a:ext uri="{FF2B5EF4-FFF2-40B4-BE49-F238E27FC236}">
+                <a16:creationId xmlns:a16="http://schemas.microsoft.com/office/drawing/2014/main" id="{86D7D773-4052-90F9-729D-45B5DF5BF5B0}"/>
+              </a:ext>
+              <a:ext uri="{C183D7F6-B498-43B3-948B-1728B52AA6E4}">
+                <adec:decorative xmlns:adec="http://schemas.microsoft.com/office/drawing/2017/decorative" val="1"/>
+              </a:ext>
+            </a:extLst>
+          </p:cNvPr>
+          <p:cNvSpPr>
+            <a:spLocks noGrp="1" noRot="1" noChangeAspect="1" noMove="1" noResize="1" noEditPoints="1" noAdjustHandles="1" noChangeArrowheads="1" noChangeShapeType="1" noTextEdit="1"/>
+          </p:cNvSpPr>
+          <p:nvPr>
+            <p:extLst>
+              <p:ext uri="{386F3935-93C4-4BCD-93E2-E3B085C9AB24}">
+                <p16:designElem xmlns:p16="http://schemas.microsoft.com/office/powerpoint/2015/main" val="1"/>
+              </p:ext>
+            </p:extLst>
+          </p:nvPr>
+        </p:nvSpPr>
+        <p:spPr>
+          <a:xfrm>
+            <a:off x="0" y="0"/>
+            <a:ext cx="12192000" cy="6858000"/>
+          </a:xfrm>
+          <a:prstGeom prst="rect">
+            <a:avLst/>
+          </a:prstGeom>
+          <a:solidFill>
+            <a:schemeClr val="bg1"/>
+          </a:solidFill>
+          <a:ln w="12700" cap="flat" cmpd="sng" algn="ctr">
+            <a:noFill/>
+            <a:prstDash val="solid"/>
+            <a:miter lim="800000"/>
+          </a:ln>
+          <a:effectLst/>
+        </p:spPr>
+        <p:style>
+          <a:lnRef idx="2">
+            <a:schemeClr val="accent1">
+              <a:shade val="50000"/>
+            </a:schemeClr>
+          </a:lnRef>
+          <a:fillRef idx="1">
+            <a:schemeClr val="accent1"/>
+          </a:fillRef>
+          <a:effectRef idx="0">
+            <a:schemeClr val="accent1"/>
+          </a:effectRef>
+          <a:fontRef idx="minor">
+            <a:schemeClr val="lt1"/>
+          </a:fontRef>
+        </p:style>
+        <p:txBody>
+          <a:bodyPr rtlCol="0" anchor="ctr"/>
+          <a:lstStyle/>
+          <a:p>
+            <a:pPr algn="ctr"/>
+            <a:endParaRPr lang="en-US"/>
+          </a:p>
+        </p:txBody>
+      </p:sp>
+      <p:sp>
+        <p:nvSpPr>
+          <p:cNvPr id="49" name="Rectangle 48">
+            <a:extLst>
+              <a:ext uri="{FF2B5EF4-FFF2-40B4-BE49-F238E27FC236}">
+                <a16:creationId xmlns:a16="http://schemas.microsoft.com/office/drawing/2014/main" id="{BA6EBC20-C6F4-D0B2-B893-4C30FE8C6AD8}"/>
+              </a:ext>
+              <a:ext uri="{C183D7F6-B498-43B3-948B-1728B52AA6E4}">
+                <adec:decorative xmlns:adec="http://schemas.microsoft.com/office/drawing/2017/decorative" val="1"/>
+              </a:ext>
+            </a:extLst>
+          </p:cNvPr>
+          <p:cNvSpPr>
+            <a:spLocks noGrp="1" noRot="1" noChangeAspect="1" noMove="1" noResize="1" noEditPoints="1" noAdjustHandles="1" noChangeArrowheads="1" noChangeShapeType="1" noTextEdit="1"/>
+          </p:cNvSpPr>
+          <p:nvPr>
+            <p:extLst>
+              <p:ext uri="{386F3935-93C4-4BCD-93E2-E3B085C9AB24}">
+                <p16:designElem xmlns:p16="http://schemas.microsoft.com/office/powerpoint/2015/main" val="1"/>
+              </p:ext>
+            </p:extLst>
+          </p:nvPr>
+        </p:nvSpPr>
+        <p:spPr>
+          <a:xfrm>
+            <a:off x="0" y="0"/>
+            <a:ext cx="12192000" cy="6858000"/>
+          </a:xfrm>
+          <a:prstGeom prst="rect">
+            <a:avLst/>
+          </a:prstGeom>
+          <a:solidFill>
+            <a:schemeClr val="bg1"/>
+          </a:solidFill>
+          <a:ln w="12700" cap="flat" cmpd="sng" algn="ctr">
+            <a:noFill/>
+            <a:prstDash val="solid"/>
+            <a:miter lim="800000"/>
+          </a:ln>
+          <a:effectLst/>
+        </p:spPr>
+        <p:style>
+          <a:lnRef idx="2">
+            <a:schemeClr val="accent1">
+              <a:shade val="50000"/>
+            </a:schemeClr>
+          </a:lnRef>
+          <a:fillRef idx="1">
+            <a:schemeClr val="accent1"/>
+          </a:fillRef>
+          <a:effectRef idx="0">
+            <a:schemeClr val="accent1"/>
+          </a:effectRef>
+          <a:fontRef idx="minor">
+            <a:schemeClr val="lt1"/>
+          </a:fontRef>
+        </p:style>
+        <p:txBody>
+          <a:bodyPr rtlCol="0" anchor="ctr"/>
+          <a:lstStyle/>
+          <a:p>
+            <a:pPr algn="ctr"/>
+            <a:endParaRPr lang="en-US"/>
+          </a:p>
+        </p:txBody>
+      </p:sp>
+      <p:sp>
+        <p:nvSpPr>
+          <p:cNvPr id="7" name="TextBox 6">
+            <a:extLst>
+              <a:ext uri="{FF2B5EF4-FFF2-40B4-BE49-F238E27FC236}">
+                <a16:creationId xmlns:a16="http://schemas.microsoft.com/office/drawing/2014/main" id="{AA2B9B32-2A4F-E95A-0057-9131250D2104}"/>
+              </a:ext>
+            </a:extLst>
+          </p:cNvPr>
+          <p:cNvSpPr txBox="1"/>
+          <p:nvPr/>
+        </p:nvSpPr>
+        <p:spPr>
+          <a:xfrm>
+            <a:off x="0" y="113122"/>
+            <a:ext cx="4119513" cy="461665"/>
+          </a:xfrm>
+          <a:prstGeom prst="rect">
+            <a:avLst/>
+          </a:prstGeom>
+          <a:noFill/>
+        </p:spPr>
+        <p:txBody>
+          <a:bodyPr wrap="square" rtlCol="0">
+            <a:spAutoFit/>
+          </a:bodyPr>
+          <a:lstStyle/>
+          <a:p>
+            <a:r>
+              <a:rPr lang="en-US" sz="2400" b="1" dirty="0">
+                <a:solidFill>
+                  <a:schemeClr val="bg1"/>
+                </a:solidFill>
+              </a:rPr>
+              <a:t>LITERATURE REVIEW</a:t>
+            </a:r>
+          </a:p>
+        </p:txBody>
+      </p:sp>
+    </p:spTree>
+    <p:extLst>
+      <p:ext uri="{BB962C8B-B14F-4D97-AF65-F5344CB8AC3E}">
+        <p14:creationId xmlns:p14="http://schemas.microsoft.com/office/powerpoint/2010/main" val="2249432390"/>
+      </p:ext>
+    </p:extLst>
+  </p:cSld>
+  <p:clrMapOvr>
+    <a:masterClrMapping/>
+  </p:clrMapOvr>
+  <mc:AlternateContent xmlns:mc="http://schemas.openxmlformats.org/markup-compatibility/2006">
+    <mc:Choice xmlns:p14="http://schemas.microsoft.com/office/powerpoint/2010/main" Requires="p14">
+      <p:transition spd="slow" p14:dur="1500">
+        <p:split orient="vert"/>
+      </p:transition>
+    </mc:Choice>
+    <mc:Fallback>
+      <p:transition spd="slow">
+        <p:split orient="vert"/>
+      </p:transition>
+    </mc:Fallback>
+  </mc:AlternateContent>
 </p:sld>
 </file>
 

--- a/Doc/Academic/Proposal/Slide_Proposal_Defence_finalized.pptx
+++ b/Doc/Academic/Proposal/Slide_Proposal_Defence_finalized.pptx
@@ -272,7 +272,7 @@
           <a:p>
             <a:fld id="{D1D1EADE-8E88-4C7C-8AC5-FB148DE4940E}" type="datetime1">
               <a:rPr lang="en-US" smtClean="0"/>
-              <a:t>12/20/2025</a:t>
+              <a:t>12/23/2025</a:t>
             </a:fld>
             <a:endParaRPr lang="en-US"/>
           </a:p>
@@ -472,7 +472,7 @@
           <a:p>
             <a:fld id="{EC3C8B9C-477D-492A-96AD-1FC2CC997A73}" type="datetime1">
               <a:rPr lang="en-US" smtClean="0"/>
-              <a:t>12/20/2025</a:t>
+              <a:t>12/23/2025</a:t>
             </a:fld>
             <a:endParaRPr lang="en-US"/>
           </a:p>
@@ -682,7 +682,7 @@
           <a:p>
             <a:fld id="{42D3AED5-E26D-4E29-B1B3-7847B6779594}" type="datetime1">
               <a:rPr lang="en-US" smtClean="0"/>
-              <a:t>12/20/2025</a:t>
+              <a:t>12/23/2025</a:t>
             </a:fld>
             <a:endParaRPr lang="en-US"/>
           </a:p>
@@ -882,7 +882,7 @@
           <a:p>
             <a:fld id="{157B6794-849E-4626-908B-D15793550EFB}" type="datetime1">
               <a:rPr lang="en-US" smtClean="0"/>
-              <a:t>12/20/2025</a:t>
+              <a:t>12/23/2025</a:t>
             </a:fld>
             <a:endParaRPr lang="en-US"/>
           </a:p>
@@ -1158,7 +1158,7 @@
           <a:p>
             <a:fld id="{63DB64E7-5594-42A3-ADBF-E95A7ACEAD64}" type="datetime1">
               <a:rPr lang="en-US" smtClean="0"/>
-              <a:t>12/20/2025</a:t>
+              <a:t>12/23/2025</a:t>
             </a:fld>
             <a:endParaRPr lang="en-US"/>
           </a:p>
@@ -1431,7 +1431,7 @@
           <a:p>
             <a:fld id="{18462B0B-D248-4FFB-8695-AD7FA4B1284A}" type="datetime1">
               <a:rPr lang="en-US" smtClean="0"/>
-              <a:t>12/20/2025</a:t>
+              <a:t>12/23/2025</a:t>
             </a:fld>
             <a:endParaRPr lang="en-US"/>
           </a:p>
@@ -1854,7 +1854,7 @@
           <a:p>
             <a:fld id="{D0378EFB-9159-4510-B73F-4F0409ADE937}" type="datetime1">
               <a:rPr lang="en-US" smtClean="0"/>
-              <a:t>12/20/2025</a:t>
+              <a:t>12/23/2025</a:t>
             </a:fld>
             <a:endParaRPr lang="en-US"/>
           </a:p>
@@ -1996,7 +1996,7 @@
           <a:p>
             <a:fld id="{89BC9412-2452-4BED-A324-9D8C115361AD}" type="datetime1">
               <a:rPr lang="en-US" smtClean="0"/>
-              <a:t>12/20/2025</a:t>
+              <a:t>12/23/2025</a:t>
             </a:fld>
             <a:endParaRPr lang="en-US"/>
           </a:p>
@@ -2109,7 +2109,7 @@
           <a:p>
             <a:fld id="{F5318F62-D251-40E8-A23C-F4CFE9FEAB41}" type="datetime1">
               <a:rPr lang="en-US" smtClean="0"/>
-              <a:t>12/20/2025</a:t>
+              <a:t>12/23/2025</a:t>
             </a:fld>
             <a:endParaRPr lang="en-US"/>
           </a:p>
@@ -2422,7 +2422,7 @@
           <a:p>
             <a:fld id="{44F76144-149E-4874-93A5-554A0357CF82}" type="datetime1">
               <a:rPr lang="en-US" smtClean="0"/>
-              <a:t>12/20/2025</a:t>
+              <a:t>12/23/2025</a:t>
             </a:fld>
             <a:endParaRPr lang="en-US"/>
           </a:p>
@@ -2715,7 +2715,7 @@
           <a:p>
             <a:fld id="{50BA65D8-0540-4835-AE5C-25D29DBA01BE}" type="datetime1">
               <a:rPr lang="en-US" smtClean="0"/>
-              <a:t>12/20/2025</a:t>
+              <a:t>12/23/2025</a:t>
             </a:fld>
             <a:endParaRPr lang="en-US"/>
           </a:p>
@@ -2957,7 +2957,7 @@
           <a:p>
             <a:fld id="{E31BA835-12AC-4E8F-955A-EA3F4DE2791F}" type="datetime1">
               <a:rPr lang="en-US" smtClean="0"/>
-              <a:t>12/20/2025</a:t>
+              <a:t>12/23/2025</a:t>
             </a:fld>
             <a:endParaRPr lang="en-US"/>
           </a:p>
@@ -4009,10 +4009,10 @@
       </p:sp>
       <p:pic>
         <p:nvPicPr>
-          <p:cNvPr id="3" name="Picture 2" descr="A screenshot of a computer&#10;&#10;AI-generated content may be incorrect.">
-            <a:extLst>
-              <a:ext uri="{FF2B5EF4-FFF2-40B4-BE49-F238E27FC236}">
-                <a16:creationId xmlns:a16="http://schemas.microsoft.com/office/drawing/2014/main" id="{AE46E02A-55A6-7509-1F29-5BD3F4B094D3}"/>
+          <p:cNvPr id="4" name="Picture 3" descr="A screenshot of a computer&#10;&#10;AI-generated content may be incorrect.">
+            <a:extLst>
+              <a:ext uri="{FF2B5EF4-FFF2-40B4-BE49-F238E27FC236}">
+                <a16:creationId xmlns:a16="http://schemas.microsoft.com/office/drawing/2014/main" id="{22C8421D-EA16-74E0-7861-22261721B760}"/>
               </a:ext>
             </a:extLst>
           </p:cNvPr>
@@ -5026,13 +5026,13 @@
   <p:clrMapOvr>
     <a:masterClrMapping/>
   </p:clrMapOvr>
-  <mc:AlternateContent xmlns:mc="http://schemas.openxmlformats.org/markup-compatibility/2006">
-    <mc:Choice xmlns:p14="http://schemas.microsoft.com/office/powerpoint/2010/main" Requires="p14">
+  <mc:AlternateContent xmlns:mc="http://schemas.openxmlformats.org/markup-compatibility/2006" xmlns:p14="http://schemas.microsoft.com/office/powerpoint/2010/main">
+    <mc:Choice Requires="p14">
       <p:transition spd="med" p14:dur="700">
         <p:fade/>
       </p:transition>
     </mc:Choice>
-    <mc:Fallback>
+    <mc:Fallback xmlns="">
       <p:transition spd="med">
         <p:fade/>
       </p:transition>
@@ -5308,12 +5308,51 @@
           </a:p>
         </p:txBody>
       </p:sp>
+      <p:sp>
+        <p:nvSpPr>
+          <p:cNvPr id="4" name="TextBox 3">
+            <a:extLst>
+              <a:ext uri="{FF2B5EF4-FFF2-40B4-BE49-F238E27FC236}">
+                <a16:creationId xmlns:a16="http://schemas.microsoft.com/office/drawing/2014/main" id="{A36CBDBD-4399-DA04-8A94-5CE19502AF6E}"/>
+              </a:ext>
+            </a:extLst>
+          </p:cNvPr>
+          <p:cNvSpPr txBox="1"/>
+          <p:nvPr/>
+        </p:nvSpPr>
+        <p:spPr>
+          <a:xfrm>
+            <a:off x="0" y="113122"/>
+            <a:ext cx="4119513" cy="461665"/>
+          </a:xfrm>
+          <a:prstGeom prst="rect">
+            <a:avLst/>
+          </a:prstGeom>
+          <a:noFill/>
+        </p:spPr>
+        <p:txBody>
+          <a:bodyPr wrap="square" rtlCol="0">
+            <a:spAutoFit/>
+          </a:bodyPr>
+          <a:lstStyle/>
+          <a:p>
+            <a:r>
+              <a:rPr lang="en-US" sz="2400" b="1" dirty="0">
+                <a:solidFill>
+                  <a:schemeClr val="bg1"/>
+                </a:solidFill>
+              </a:rPr>
+              <a:t>LITERATURE REVIEW</a:t>
+            </a:r>
+          </a:p>
+        </p:txBody>
+      </p:sp>
       <p:pic>
         <p:nvPicPr>
-          <p:cNvPr id="3" name="Picture 2" descr="A screenshot of a computer">
-            <a:extLst>
-              <a:ext uri="{FF2B5EF4-FFF2-40B4-BE49-F238E27FC236}">
-                <a16:creationId xmlns:a16="http://schemas.microsoft.com/office/drawing/2014/main" id="{7ABF2BF9-F4C6-A58E-0AE0-8B26D254D601}"/>
+          <p:cNvPr id="5" name="Picture 4" descr="A screenshot of a computer">
+            <a:extLst>
+              <a:ext uri="{FF2B5EF4-FFF2-40B4-BE49-F238E27FC236}">
+                <a16:creationId xmlns:a16="http://schemas.microsoft.com/office/drawing/2014/main" id="{2CB815B8-D366-4B4B-036B-8B6283489F10}"/>
               </a:ext>
             </a:extLst>
           </p:cNvPr>
@@ -5330,8 +5369,8 @@
         </p:blipFill>
         <p:spPr>
           <a:xfrm>
-            <a:off x="0" y="1390"/>
-            <a:ext cx="12192000" cy="6855220"/>
+            <a:off x="0" y="4566"/>
+            <a:ext cx="12192000" cy="6848867"/>
           </a:xfrm>
           <a:prstGeom prst="rect">
             <a:avLst/>
@@ -5340,10 +5379,10 @@
       </p:pic>
       <p:sp>
         <p:nvSpPr>
-          <p:cNvPr id="4" name="TextBox 3">
-            <a:extLst>
-              <a:ext uri="{FF2B5EF4-FFF2-40B4-BE49-F238E27FC236}">
-                <a16:creationId xmlns:a16="http://schemas.microsoft.com/office/drawing/2014/main" id="{A36CBDBD-4399-DA04-8A94-5CE19502AF6E}"/>
+          <p:cNvPr id="6" name="TextBox 5">
+            <a:extLst>
+              <a:ext uri="{FF2B5EF4-FFF2-40B4-BE49-F238E27FC236}">
+                <a16:creationId xmlns:a16="http://schemas.microsoft.com/office/drawing/2014/main" id="{7E402DF2-918E-ED6F-CAC6-F93E49DBBFEA}"/>
               </a:ext>
             </a:extLst>
           </p:cNvPr>
@@ -5352,7 +5391,7 @@
         </p:nvSpPr>
         <p:spPr>
           <a:xfrm>
-            <a:off x="0" y="113122"/>
+            <a:off x="152400" y="265522"/>
             <a:ext cx="4119513" cy="461665"/>
           </a:xfrm>
           <a:prstGeom prst="rect">
@@ -5387,13 +5426,13 @@
   <p:clrMapOvr>
     <a:masterClrMapping/>
   </p:clrMapOvr>
-  <mc:AlternateContent xmlns:mc="http://schemas.openxmlformats.org/markup-compatibility/2006">
-    <mc:Choice xmlns:p159="http://schemas.microsoft.com/office/powerpoint/2015/09/main" Requires="p159">
+  <mc:AlternateContent xmlns:mc="http://schemas.openxmlformats.org/markup-compatibility/2006" xmlns:p159="http://schemas.microsoft.com/office/powerpoint/2015/09/main">
+    <mc:Choice Requires="p159">
       <p:transition xmlns:p14="http://schemas.microsoft.com/office/powerpoint/2010/main" spd="slow" p14:dur="2000">
         <p159:morph option="byObject"/>
       </p:transition>
     </mc:Choice>
-    <mc:Fallback>
+    <mc:Fallback xmlns="">
       <p:transition spd="slow">
         <p:fade/>
       </p:transition>
@@ -5748,13 +5787,13 @@
   <p:clrMapOvr>
     <a:masterClrMapping/>
   </p:clrMapOvr>
-  <mc:AlternateContent xmlns:mc="http://schemas.openxmlformats.org/markup-compatibility/2006">
-    <mc:Choice xmlns:p14="http://schemas.microsoft.com/office/powerpoint/2010/main" Requires="p14">
+  <mc:AlternateContent xmlns:mc="http://schemas.openxmlformats.org/markup-compatibility/2006" xmlns:p14="http://schemas.microsoft.com/office/powerpoint/2010/main">
+    <mc:Choice Requires="p14">
       <p:transition spd="slow" p14:dur="1500">
         <p:split orient="vert"/>
       </p:transition>
     </mc:Choice>
-    <mc:Fallback>
+    <mc:Fallback xmlns="">
       <p:transition spd="slow">
         <p:split orient="vert"/>
       </p:transition>
@@ -6079,13 +6118,13 @@
   <p:clrMapOvr>
     <a:masterClrMapping/>
   </p:clrMapOvr>
-  <mc:AlternateContent xmlns:mc="http://schemas.openxmlformats.org/markup-compatibility/2006">
-    <mc:Choice xmlns:p14="http://schemas.microsoft.com/office/powerpoint/2010/main" Requires="p14">
+  <mc:AlternateContent xmlns:mc="http://schemas.openxmlformats.org/markup-compatibility/2006" xmlns:p14="http://schemas.microsoft.com/office/powerpoint/2010/main">
+    <mc:Choice Requires="p14">
       <p:transition spd="slow" p14:dur="1500">
         <p:split orient="vert"/>
       </p:transition>
     </mc:Choice>
-    <mc:Fallback>
+    <mc:Fallback xmlns="">
       <p:transition spd="slow">
         <p:split orient="vert"/>
       </p:transition>
